--- a/koreatech-db/theory/이론8장_데이터_관리·보안과_동향.pptx
+++ b/koreatech-db/theory/이론8장_데이터_관리·보안과_동향.pptx
@@ -12880,9 +12880,9 @@
                 <a:solidFill>
                   <a:srgbClr val="7A869C"/>
                 </a:solidFill>
-                <a:latin typeface="나눔고딕코딩"/>
-                <a:ea typeface="나눔고딕코딩"/>
-                <a:cs typeface="나눔고딕코딩"/>
+                <a:latin typeface="D2Coding"/>
+                <a:ea typeface="D2Coding"/>
+                <a:cs typeface="D2Coding"/>
               </a:rPr>
               <a:t>1</a:t>
             </a:r>
@@ -12898,9 +12898,9 @@
                 <a:solidFill>
                   <a:srgbClr val="7A869C"/>
                 </a:solidFill>
-                <a:latin typeface="나눔고딕코딩"/>
-                <a:ea typeface="나눔고딕코딩"/>
-                <a:cs typeface="나눔고딕코딩"/>
+                <a:latin typeface="D2Coding"/>
+                <a:ea typeface="D2Coding"/>
+                <a:cs typeface="D2Coding"/>
               </a:rPr>
               <a:t>2</a:t>
             </a:r>
@@ -12916,9 +12916,9 @@
                 <a:solidFill>
                   <a:srgbClr val="7A869C"/>
                 </a:solidFill>
-                <a:latin typeface="나눔고딕코딩"/>
-                <a:ea typeface="나눔고딕코딩"/>
-                <a:cs typeface="나눔고딕코딩"/>
+                <a:latin typeface="D2Coding"/>
+                <a:ea typeface="D2Coding"/>
+                <a:cs typeface="D2Coding"/>
               </a:rPr>
               <a:t>3</a:t>
             </a:r>
@@ -12934,9 +12934,9 @@
                 <a:solidFill>
                   <a:srgbClr val="7A869C"/>
                 </a:solidFill>
-                <a:latin typeface="나눔고딕코딩"/>
-                <a:ea typeface="나눔고딕코딩"/>
-                <a:cs typeface="나눔고딕코딩"/>
+                <a:latin typeface="D2Coding"/>
+                <a:ea typeface="D2Coding"/>
+                <a:cs typeface="D2Coding"/>
               </a:rPr>
               <a:t>4</a:t>
             </a:r>
@@ -12952,9 +12952,9 @@
                 <a:solidFill>
                   <a:srgbClr val="7A869C"/>
                 </a:solidFill>
-                <a:latin typeface="나눔고딕코딩"/>
-                <a:ea typeface="나눔고딕코딩"/>
-                <a:cs typeface="나눔고딕코딩"/>
+                <a:latin typeface="D2Coding"/>
+                <a:ea typeface="D2Coding"/>
+                <a:cs typeface="D2Coding"/>
               </a:rPr>
               <a:t>5</a:t>
             </a:r>
@@ -12970,9 +12970,9 @@
                 <a:solidFill>
                   <a:srgbClr val="7A869C"/>
                 </a:solidFill>
-                <a:latin typeface="나눔고딕코딩"/>
-                <a:ea typeface="나눔고딕코딩"/>
-                <a:cs typeface="나눔고딕코딩"/>
+                <a:latin typeface="D2Coding"/>
+                <a:ea typeface="D2Coding"/>
+                <a:cs typeface="D2Coding"/>
               </a:rPr>
               <a:t>6</a:t>
             </a:r>
@@ -12988,9 +12988,9 @@
                 <a:solidFill>
                   <a:srgbClr val="7A869C"/>
                 </a:solidFill>
-                <a:latin typeface="나눔고딕코딩"/>
-                <a:ea typeface="나눔고딕코딩"/>
-                <a:cs typeface="나눔고딕코딩"/>
+                <a:latin typeface="D2Coding"/>
+                <a:ea typeface="D2Coding"/>
+                <a:cs typeface="D2Coding"/>
               </a:rPr>
               <a:t>7</a:t>
             </a:r>
@@ -13006,9 +13006,9 @@
                 <a:solidFill>
                   <a:srgbClr val="7A869C"/>
                 </a:solidFill>
-                <a:latin typeface="나눔고딕코딩"/>
-                <a:ea typeface="나눔고딕코딩"/>
-                <a:cs typeface="나눔고딕코딩"/>
+                <a:latin typeface="D2Coding"/>
+                <a:ea typeface="D2Coding"/>
+                <a:cs typeface="D2Coding"/>
               </a:rPr>
               <a:t>8</a:t>
             </a:r>
@@ -13024,9 +13024,9 @@
                 <a:solidFill>
                   <a:srgbClr val="7A869C"/>
                 </a:solidFill>
-                <a:latin typeface="나눔고딕코딩"/>
-                <a:ea typeface="나눔고딕코딩"/>
-                <a:cs typeface="나눔고딕코딩"/>
+                <a:latin typeface="D2Coding"/>
+                <a:ea typeface="D2Coding"/>
+                <a:cs typeface="D2Coding"/>
               </a:rPr>
               <a:t>9</a:t>
             </a:r>
@@ -13042,9 +13042,9 @@
                 <a:solidFill>
                   <a:srgbClr val="7A869C"/>
                 </a:solidFill>
-                <a:latin typeface="나눔고딕코딩"/>
-                <a:ea typeface="나눔고딕코딩"/>
-                <a:cs typeface="나눔고딕코딩"/>
+                <a:latin typeface="D2Coding"/>
+                <a:ea typeface="D2Coding"/>
+                <a:cs typeface="D2Coding"/>
               </a:rPr>
               <a:t>10</a:t>
             </a:r>
@@ -13060,9 +13060,9 @@
                 <a:solidFill>
                   <a:srgbClr val="7A869C"/>
                 </a:solidFill>
-                <a:latin typeface="나눔고딕코딩"/>
-                <a:ea typeface="나눔고딕코딩"/>
-                <a:cs typeface="나눔고딕코딩"/>
+                <a:latin typeface="D2Coding"/>
+                <a:ea typeface="D2Coding"/>
+                <a:cs typeface="D2Coding"/>
               </a:rPr>
               <a:t>11</a:t>
             </a:r>
@@ -13101,9 +13101,9 @@
                 <a:solidFill>
                   <a:srgbClr val="E6EAF2"/>
                 </a:solidFill>
-                <a:latin typeface="나눔고딕코딩"/>
-                <a:ea typeface="나눔고딕코딩"/>
-                <a:cs typeface="나눔고딕코딩"/>
+                <a:latin typeface="D2Coding"/>
+                <a:ea typeface="D2Coding"/>
+                <a:cs typeface="D2Coding"/>
               </a:rPr>
               <a:t>-- 이름은 첫 글자만, 이메일은 앞 두 글자만 남기고 가린다</a:t>
             </a:r>
@@ -13119,9 +13119,9 @@
                 <a:solidFill>
                   <a:srgbClr val="E6EAF2"/>
                 </a:solidFill>
-                <a:latin typeface="나눔고딕코딩"/>
-                <a:ea typeface="나눔고딕코딩"/>
-                <a:cs typeface="나눔고딕코딩"/>
+                <a:latin typeface="D2Coding"/>
+                <a:ea typeface="D2Coding"/>
+                <a:cs typeface="D2Coding"/>
               </a:rPr>
               <a:t>SELECT CONCAT(LEFT(name, 1), '**')                       AS 이름,</a:t>
             </a:r>
@@ -13137,9 +13137,9 @@
                 <a:solidFill>
                   <a:srgbClr val="E6EAF2"/>
                 </a:solidFill>
-                <a:latin typeface="나눔고딕코딩"/>
-                <a:ea typeface="나눔고딕코딩"/>
-                <a:cs typeface="나눔고딕코딩"/>
+                <a:latin typeface="D2Coding"/>
+                <a:ea typeface="D2Coding"/>
+                <a:cs typeface="D2Coding"/>
               </a:rPr>
               <a:t>       CONCAT(LEFT(email, 2), '****@****')               AS 이메일,</a:t>
             </a:r>
@@ -13155,9 +13155,9 @@
                 <a:solidFill>
                   <a:srgbClr val="E6EAF2"/>
                 </a:solidFill>
-                <a:latin typeface="나눔고딕코딩"/>
-                <a:ea typeface="나눔고딕코딩"/>
-                <a:cs typeface="나눔고딕코딩"/>
+                <a:latin typeface="D2Coding"/>
+                <a:ea typeface="D2Coding"/>
+                <a:cs typeface="D2Coding"/>
               </a:rPr>
               <a:t>       grade, city, points</a:t>
             </a:r>
@@ -13173,9 +13173,9 @@
                 <a:solidFill>
                   <a:srgbClr val="E6EAF2"/>
                 </a:solidFill>
-                <a:latin typeface="나눔고딕코딩"/>
-                <a:ea typeface="나눔고딕코딩"/>
-                <a:cs typeface="나눔고딕코딩"/>
+                <a:latin typeface="D2Coding"/>
+                <a:ea typeface="D2Coding"/>
+                <a:cs typeface="D2Coding"/>
               </a:rPr>
               <a:t>FROM   customers;</a:t>
             </a:r>
@@ -13191,9 +13191,9 @@
                 <a:solidFill>
                   <a:srgbClr val="E6EAF2"/>
                 </a:solidFill>
-                <a:latin typeface="나눔고딕코딩"/>
-                <a:ea typeface="나눔고딕코딩"/>
-                <a:cs typeface="나눔고딕코딩"/>
+                <a:latin typeface="D2Coding"/>
+                <a:ea typeface="D2Coding"/>
+                <a:cs typeface="D2Coding"/>
               </a:rPr>
               <a:t>/*</a:t>
             </a:r>
@@ -13209,9 +13209,9 @@
                 <a:solidFill>
                   <a:srgbClr val="E6EAF2"/>
                 </a:solidFill>
-                <a:latin typeface="나눔고딕코딩"/>
-                <a:ea typeface="나눔고딕코딩"/>
-                <a:cs typeface="나눔고딕코딩"/>
+                <a:latin typeface="D2Coding"/>
+                <a:ea typeface="D2Coding"/>
+                <a:cs typeface="D2Coding"/>
               </a:rPr>
               <a:t> 한** | ga****@**** | VIP    | 서울 | 4500</a:t>
             </a:r>
@@ -13227,9 +13227,9 @@
                 <a:solidFill>
                   <a:srgbClr val="E6EAF2"/>
                 </a:solidFill>
-                <a:latin typeface="나눔고딕코딩"/>
-                <a:ea typeface="나눔고딕코딩"/>
-                <a:cs typeface="나눔고딕코딩"/>
+                <a:latin typeface="D2Coding"/>
+                <a:ea typeface="D2Coding"/>
+                <a:cs typeface="D2Coding"/>
               </a:rPr>
               <a:t> 오** | se****@**** | GOLD   | 부산 | 2300</a:t>
             </a:r>
@@ -13245,9 +13245,9 @@
                 <a:solidFill>
                   <a:srgbClr val="E6EAF2"/>
                 </a:solidFill>
-                <a:latin typeface="나눔고딕코딩"/>
-                <a:ea typeface="나눔고딕코딩"/>
-                <a:cs typeface="나눔고딕코딩"/>
+                <a:latin typeface="D2Coding"/>
+                <a:ea typeface="D2Coding"/>
+                <a:cs typeface="D2Coding"/>
               </a:rPr>
               <a:t> ...</a:t>
             </a:r>
@@ -13263,9 +13263,9 @@
                 <a:solidFill>
                   <a:srgbClr val="E6EAF2"/>
                 </a:solidFill>
-                <a:latin typeface="나눔고딕코딩"/>
-                <a:ea typeface="나눔고딕코딩"/>
-                <a:cs typeface="나눔고딕코딩"/>
+                <a:latin typeface="D2Coding"/>
+                <a:ea typeface="D2Coding"/>
+                <a:cs typeface="D2Coding"/>
               </a:rPr>
               <a:t>*/</a:t>
             </a:r>
@@ -13281,9 +13281,9 @@
                 <a:solidFill>
                   <a:srgbClr val="E6EAF2"/>
                 </a:solidFill>
-                <a:latin typeface="나눔고딕코딩"/>
-                <a:ea typeface="나눔고딕코딩"/>
-                <a:cs typeface="나눔고딕코딩"/>
+                <a:latin typeface="D2Coding"/>
+                <a:ea typeface="D2Coding"/>
+                <a:cs typeface="D2Coding"/>
               </a:rPr>
               <a:t>-- 실무에서는 이런 결과를 뷰로 만들어 분석 계정에 제공한다</a:t>
             </a:r>
@@ -31189,9 +31189,9 @@
                 <a:solidFill>
                   <a:srgbClr val="7A869C"/>
                 </a:solidFill>
-                <a:latin typeface="나눔고딕코딩"/>
-                <a:ea typeface="나눔고딕코딩"/>
-                <a:cs typeface="나눔고딕코딩"/>
+                <a:latin typeface="D2Coding"/>
+                <a:ea typeface="D2Coding"/>
+                <a:cs typeface="D2Coding"/>
               </a:rPr>
               <a:t>1</a:t>
             </a:r>
@@ -31207,9 +31207,9 @@
                 <a:solidFill>
                   <a:srgbClr val="7A869C"/>
                 </a:solidFill>
-                <a:latin typeface="나눔고딕코딩"/>
-                <a:ea typeface="나눔고딕코딩"/>
-                <a:cs typeface="나눔고딕코딩"/>
+                <a:latin typeface="D2Coding"/>
+                <a:ea typeface="D2Coding"/>
+                <a:cs typeface="D2Coding"/>
               </a:rPr>
               <a:t>2</a:t>
             </a:r>
@@ -31225,9 +31225,9 @@
                 <a:solidFill>
                   <a:srgbClr val="7A869C"/>
                 </a:solidFill>
-                <a:latin typeface="나눔고딕코딩"/>
-                <a:ea typeface="나눔고딕코딩"/>
-                <a:cs typeface="나눔고딕코딩"/>
+                <a:latin typeface="D2Coding"/>
+                <a:ea typeface="D2Coding"/>
+                <a:cs typeface="D2Coding"/>
               </a:rPr>
               <a:t>3</a:t>
             </a:r>
@@ -31243,9 +31243,9 @@
                 <a:solidFill>
                   <a:srgbClr val="7A869C"/>
                 </a:solidFill>
-                <a:latin typeface="나눔고딕코딩"/>
-                <a:ea typeface="나눔고딕코딩"/>
-                <a:cs typeface="나눔고딕코딩"/>
+                <a:latin typeface="D2Coding"/>
+                <a:ea typeface="D2Coding"/>
+                <a:cs typeface="D2Coding"/>
               </a:rPr>
               <a:t>4</a:t>
             </a:r>
@@ -31261,9 +31261,9 @@
                 <a:solidFill>
                   <a:srgbClr val="7A869C"/>
                 </a:solidFill>
-                <a:latin typeface="나눔고딕코딩"/>
-                <a:ea typeface="나눔고딕코딩"/>
-                <a:cs typeface="나눔고딕코딩"/>
+                <a:latin typeface="D2Coding"/>
+                <a:ea typeface="D2Coding"/>
+                <a:cs typeface="D2Coding"/>
               </a:rPr>
               <a:t>5</a:t>
             </a:r>
@@ -31279,9 +31279,9 @@
                 <a:solidFill>
                   <a:srgbClr val="7A869C"/>
                 </a:solidFill>
-                <a:latin typeface="나눔고딕코딩"/>
-                <a:ea typeface="나눔고딕코딩"/>
-                <a:cs typeface="나눔고딕코딩"/>
+                <a:latin typeface="D2Coding"/>
+                <a:ea typeface="D2Coding"/>
+                <a:cs typeface="D2Coding"/>
               </a:rPr>
               <a:t>6</a:t>
             </a:r>
@@ -31297,9 +31297,9 @@
                 <a:solidFill>
                   <a:srgbClr val="7A869C"/>
                 </a:solidFill>
-                <a:latin typeface="나눔고딕코딩"/>
-                <a:ea typeface="나눔고딕코딩"/>
-                <a:cs typeface="나눔고딕코딩"/>
+                <a:latin typeface="D2Coding"/>
+                <a:ea typeface="D2Coding"/>
+                <a:cs typeface="D2Coding"/>
               </a:rPr>
               <a:t>7</a:t>
             </a:r>
@@ -31315,9 +31315,9 @@
                 <a:solidFill>
                   <a:srgbClr val="7A869C"/>
                 </a:solidFill>
-                <a:latin typeface="나눔고딕코딩"/>
-                <a:ea typeface="나눔고딕코딩"/>
-                <a:cs typeface="나눔고딕코딩"/>
+                <a:latin typeface="D2Coding"/>
+                <a:ea typeface="D2Coding"/>
+                <a:cs typeface="D2Coding"/>
               </a:rPr>
               <a:t>8</a:t>
             </a:r>
@@ -31333,9 +31333,9 @@
                 <a:solidFill>
                   <a:srgbClr val="7A869C"/>
                 </a:solidFill>
-                <a:latin typeface="나눔고딕코딩"/>
-                <a:ea typeface="나눔고딕코딩"/>
-                <a:cs typeface="나눔고딕코딩"/>
+                <a:latin typeface="D2Coding"/>
+                <a:ea typeface="D2Coding"/>
+                <a:cs typeface="D2Coding"/>
               </a:rPr>
               <a:t>9</a:t>
             </a:r>
@@ -31351,9 +31351,9 @@
                 <a:solidFill>
                   <a:srgbClr val="7A869C"/>
                 </a:solidFill>
-                <a:latin typeface="나눔고딕코딩"/>
-                <a:ea typeface="나눔고딕코딩"/>
-                <a:cs typeface="나눔고딕코딩"/>
+                <a:latin typeface="D2Coding"/>
+                <a:ea typeface="D2Coding"/>
+                <a:cs typeface="D2Coding"/>
               </a:rPr>
               <a:t>10</a:t>
             </a:r>
@@ -31392,9 +31392,9 @@
                 <a:solidFill>
                   <a:srgbClr val="E6EAF2"/>
                 </a:solidFill>
-                <a:latin typeface="나눔고딕코딩"/>
-                <a:ea typeface="나눔고딕코딩"/>
-                <a:cs typeface="나눔고딕코딩"/>
+                <a:latin typeface="D2Coding"/>
+                <a:ea typeface="D2Coding"/>
+                <a:cs typeface="D2Coding"/>
               </a:rPr>
               <a:t>-- 마케팅팀: 고객·주문을 '읽기'만 — 고치거나 지울 일은 없다</a:t>
             </a:r>
@@ -31410,9 +31410,9 @@
                 <a:solidFill>
                   <a:srgbClr val="E6EAF2"/>
                 </a:solidFill>
-                <a:latin typeface="나눔고딕코딩"/>
-                <a:ea typeface="나눔고딕코딩"/>
-                <a:cs typeface="나눔고딕코딩"/>
+                <a:latin typeface="D2Coding"/>
+                <a:ea typeface="D2Coding"/>
+                <a:cs typeface="D2Coding"/>
               </a:rPr>
               <a:t>GRANT SELECT ON daon.customers TO 'marketing'@'%';</a:t>
             </a:r>
@@ -31428,9 +31428,9 @@
                 <a:solidFill>
                   <a:srgbClr val="E6EAF2"/>
                 </a:solidFill>
-                <a:latin typeface="나눔고딕코딩"/>
-                <a:ea typeface="나눔고딕코딩"/>
-                <a:cs typeface="나눔고딕코딩"/>
+                <a:latin typeface="D2Coding"/>
+                <a:ea typeface="D2Coding"/>
+                <a:cs typeface="D2Coding"/>
               </a:rPr>
               <a:t>GRANT SELECT ON daon.orders    TO 'marketing'@'%';</a:t>
             </a:r>
@@ -31446,9 +31446,9 @@
                 <a:solidFill>
                   <a:srgbClr val="E6EAF2"/>
                 </a:solidFill>
-                <a:latin typeface="나눔고딕코딩"/>
-                <a:ea typeface="나눔고딕코딩"/>
-                <a:cs typeface="나눔고딕코딩"/>
+                <a:latin typeface="D2Coding"/>
+                <a:ea typeface="D2Coding"/>
+                <a:cs typeface="D2Coding"/>
               </a:rPr>
               <a:t/>
             </a:r>
@@ -31464,9 +31464,9 @@
                 <a:solidFill>
                   <a:srgbClr val="E6EAF2"/>
                 </a:solidFill>
-                <a:latin typeface="나눔고딕코딩"/>
-                <a:ea typeface="나눔고딕코딩"/>
-                <a:cs typeface="나눔고딕코딩"/>
+                <a:latin typeface="D2Coding"/>
+                <a:ea typeface="D2Coding"/>
+                <a:cs typeface="D2Coding"/>
               </a:rPr>
               <a:t>-- 영업팀: 주문은 접수·수정까지, 고객은 읽기만</a:t>
             </a:r>
@@ -31482,9 +31482,9 @@
                 <a:solidFill>
                   <a:srgbClr val="E6EAF2"/>
                 </a:solidFill>
-                <a:latin typeface="나눔고딕코딩"/>
-                <a:ea typeface="나눔고딕코딩"/>
-                <a:cs typeface="나눔고딕코딩"/>
+                <a:latin typeface="D2Coding"/>
+                <a:ea typeface="D2Coding"/>
+                <a:cs typeface="D2Coding"/>
               </a:rPr>
               <a:t>GRANT SELECT, INSERT, UPDATE ON daon.orders TO 'sales'@'%';</a:t>
             </a:r>
@@ -31500,9 +31500,9 @@
                 <a:solidFill>
                   <a:srgbClr val="E6EAF2"/>
                 </a:solidFill>
-                <a:latin typeface="나눔고딕코딩"/>
-                <a:ea typeface="나눔고딕코딩"/>
-                <a:cs typeface="나눔고딕코딩"/>
+                <a:latin typeface="D2Coding"/>
+                <a:ea typeface="D2Coding"/>
+                <a:cs typeface="D2Coding"/>
               </a:rPr>
               <a:t>GRANT SELECT ON daon.customers TO 'sales'@'%';</a:t>
             </a:r>
@@ -31518,9 +31518,9 @@
                 <a:solidFill>
                   <a:srgbClr val="E6EAF2"/>
                 </a:solidFill>
-                <a:latin typeface="나눔고딕코딩"/>
-                <a:ea typeface="나눔고딕코딩"/>
-                <a:cs typeface="나눔고딕코딩"/>
+                <a:latin typeface="D2Coding"/>
+                <a:ea typeface="D2Coding"/>
+                <a:cs typeface="D2Coding"/>
               </a:rPr>
               <a:t/>
             </a:r>
@@ -31536,9 +31536,9 @@
                 <a:solidFill>
                   <a:srgbClr val="E6EAF2"/>
                 </a:solidFill>
-                <a:latin typeface="나눔고딕코딩"/>
-                <a:ea typeface="나눔고딕코딩"/>
-                <a:cs typeface="나눔고딕코딩"/>
+                <a:latin typeface="D2Coding"/>
+                <a:ea typeface="D2Coding"/>
+                <a:cs typeface="D2Coding"/>
               </a:rPr>
               <a:t>-- 부서 이동으로 더 이상 필요 없어지면 회수</a:t>
             </a:r>
@@ -31554,9 +31554,9 @@
                 <a:solidFill>
                   <a:srgbClr val="E6EAF2"/>
                 </a:solidFill>
-                <a:latin typeface="나눔고딕코딩"/>
-                <a:ea typeface="나눔고딕코딩"/>
-                <a:cs typeface="나눔고딕코딩"/>
+                <a:latin typeface="D2Coding"/>
+                <a:ea typeface="D2Coding"/>
+                <a:cs typeface="D2Coding"/>
               </a:rPr>
               <a:t>REVOKE SELECT ON daon.customers FROM 'marketing'@'%';</a:t>
             </a:r>
@@ -35806,9 +35806,9 @@
                 <a:solidFill>
                   <a:srgbClr val="7A869C"/>
                 </a:solidFill>
-                <a:latin typeface="나눔고딕코딩"/>
-                <a:ea typeface="나눔고딕코딩"/>
-                <a:cs typeface="나눔고딕코딩"/>
+                <a:latin typeface="D2Coding"/>
+                <a:ea typeface="D2Coding"/>
+                <a:cs typeface="D2Coding"/>
               </a:rPr>
               <a:t>1</a:t>
             </a:r>
@@ -35824,9 +35824,9 @@
                 <a:solidFill>
                   <a:srgbClr val="7A869C"/>
                 </a:solidFill>
-                <a:latin typeface="나눔고딕코딩"/>
-                <a:ea typeface="나눔고딕코딩"/>
-                <a:cs typeface="나눔고딕코딩"/>
+                <a:latin typeface="D2Coding"/>
+                <a:ea typeface="D2Coding"/>
+                <a:cs typeface="D2Coding"/>
               </a:rPr>
               <a:t>2</a:t>
             </a:r>
@@ -35842,9 +35842,9 @@
                 <a:solidFill>
                   <a:srgbClr val="7A869C"/>
                 </a:solidFill>
-                <a:latin typeface="나눔고딕코딩"/>
-                <a:ea typeface="나눔고딕코딩"/>
-                <a:cs typeface="나눔고딕코딩"/>
+                <a:latin typeface="D2Coding"/>
+                <a:ea typeface="D2Coding"/>
+                <a:cs typeface="D2Coding"/>
               </a:rPr>
               <a:t>3</a:t>
             </a:r>
@@ -35860,9 +35860,9 @@
                 <a:solidFill>
                   <a:srgbClr val="7A869C"/>
                 </a:solidFill>
-                <a:latin typeface="나눔고딕코딩"/>
-                <a:ea typeface="나눔고딕코딩"/>
-                <a:cs typeface="나눔고딕코딩"/>
+                <a:latin typeface="D2Coding"/>
+                <a:ea typeface="D2Coding"/>
+                <a:cs typeface="D2Coding"/>
               </a:rPr>
               <a:t>4</a:t>
             </a:r>
@@ -35878,9 +35878,9 @@
                 <a:solidFill>
                   <a:srgbClr val="7A869C"/>
                 </a:solidFill>
-                <a:latin typeface="나눔고딕코딩"/>
-                <a:ea typeface="나눔고딕코딩"/>
-                <a:cs typeface="나눔고딕코딩"/>
+                <a:latin typeface="D2Coding"/>
+                <a:ea typeface="D2Coding"/>
+                <a:cs typeface="D2Coding"/>
               </a:rPr>
               <a:t>5</a:t>
             </a:r>
@@ -35896,9 +35896,9 @@
                 <a:solidFill>
                   <a:srgbClr val="7A869C"/>
                 </a:solidFill>
-                <a:latin typeface="나눔고딕코딩"/>
-                <a:ea typeface="나눔고딕코딩"/>
-                <a:cs typeface="나눔고딕코딩"/>
+                <a:latin typeface="D2Coding"/>
+                <a:ea typeface="D2Coding"/>
+                <a:cs typeface="D2Coding"/>
               </a:rPr>
               <a:t>6</a:t>
             </a:r>
@@ -35914,9 +35914,9 @@
                 <a:solidFill>
                   <a:srgbClr val="7A869C"/>
                 </a:solidFill>
-                <a:latin typeface="나눔고딕코딩"/>
-                <a:ea typeface="나눔고딕코딩"/>
-                <a:cs typeface="나눔고딕코딩"/>
+                <a:latin typeface="D2Coding"/>
+                <a:ea typeface="D2Coding"/>
+                <a:cs typeface="D2Coding"/>
               </a:rPr>
               <a:t>7</a:t>
             </a:r>
@@ -35932,9 +35932,9 @@
                 <a:solidFill>
                   <a:srgbClr val="7A869C"/>
                 </a:solidFill>
-                <a:latin typeface="나눔고딕코딩"/>
-                <a:ea typeface="나눔고딕코딩"/>
-                <a:cs typeface="나눔고딕코딩"/>
+                <a:latin typeface="D2Coding"/>
+                <a:ea typeface="D2Coding"/>
+                <a:cs typeface="D2Coding"/>
               </a:rPr>
               <a:t>8</a:t>
             </a:r>
@@ -35950,9 +35950,9 @@
                 <a:solidFill>
                   <a:srgbClr val="7A869C"/>
                 </a:solidFill>
-                <a:latin typeface="나눔고딕코딩"/>
-                <a:ea typeface="나눔고딕코딩"/>
-                <a:cs typeface="나눔고딕코딩"/>
+                <a:latin typeface="D2Coding"/>
+                <a:ea typeface="D2Coding"/>
+                <a:cs typeface="D2Coding"/>
               </a:rPr>
               <a:t>9</a:t>
             </a:r>
@@ -35968,9 +35968,9 @@
                 <a:solidFill>
                   <a:srgbClr val="7A869C"/>
                 </a:solidFill>
-                <a:latin typeface="나눔고딕코딩"/>
-                <a:ea typeface="나눔고딕코딩"/>
-                <a:cs typeface="나눔고딕코딩"/>
+                <a:latin typeface="D2Coding"/>
+                <a:ea typeface="D2Coding"/>
+                <a:cs typeface="D2Coding"/>
               </a:rPr>
               <a:t>10</a:t>
             </a:r>
@@ -35986,9 +35986,9 @@
                 <a:solidFill>
                   <a:srgbClr val="7A869C"/>
                 </a:solidFill>
-                <a:latin typeface="나눔고딕코딩"/>
-                <a:ea typeface="나눔고딕코딩"/>
-                <a:cs typeface="나눔고딕코딩"/>
+                <a:latin typeface="D2Coding"/>
+                <a:ea typeface="D2Coding"/>
+                <a:cs typeface="D2Coding"/>
               </a:rPr>
               <a:t>11</a:t>
             </a:r>
@@ -36004,9 +36004,9 @@
                 <a:solidFill>
                   <a:srgbClr val="7A869C"/>
                 </a:solidFill>
-                <a:latin typeface="나눔고딕코딩"/>
-                <a:ea typeface="나눔고딕코딩"/>
-                <a:cs typeface="나눔고딕코딩"/>
+                <a:latin typeface="D2Coding"/>
+                <a:ea typeface="D2Coding"/>
+                <a:cs typeface="D2Coding"/>
               </a:rPr>
               <a:t>12</a:t>
             </a:r>
@@ -36022,9 +36022,9 @@
                 <a:solidFill>
                   <a:srgbClr val="7A869C"/>
                 </a:solidFill>
-                <a:latin typeface="나눔고딕코딩"/>
-                <a:ea typeface="나눔고딕코딩"/>
-                <a:cs typeface="나눔고딕코딩"/>
+                <a:latin typeface="D2Coding"/>
+                <a:ea typeface="D2Coding"/>
+                <a:cs typeface="D2Coding"/>
               </a:rPr>
               <a:t>13</a:t>
             </a:r>
@@ -36063,9 +36063,9 @@
                 <a:solidFill>
                   <a:srgbClr val="E6EAF2"/>
                 </a:solidFill>
-                <a:latin typeface="나눔고딕코딩"/>
-                <a:ea typeface="나눔고딕코딩"/>
-                <a:cs typeface="나눔고딕코딩"/>
+                <a:latin typeface="D2Coding"/>
+                <a:ea typeface="D2Coding"/>
+                <a:cs typeface="D2Coding"/>
               </a:rPr>
               <a:t>-- 분석에는 등급·도시·포인트면 충분하다. 이메일은 뺀다.</a:t>
             </a:r>
@@ -36081,9 +36081,9 @@
                 <a:solidFill>
                   <a:srgbClr val="E6EAF2"/>
                 </a:solidFill>
-                <a:latin typeface="나눔고딕코딩"/>
-                <a:ea typeface="나눔고딕코딩"/>
-                <a:cs typeface="나눔고딕코딩"/>
+                <a:latin typeface="D2Coding"/>
+                <a:ea typeface="D2Coding"/>
+                <a:cs typeface="D2Coding"/>
               </a:rPr>
               <a:t>CREATE VIEW v_customer_stats AS</a:t>
             </a:r>
@@ -36099,9 +36099,9 @@
                 <a:solidFill>
                   <a:srgbClr val="E6EAF2"/>
                 </a:solidFill>
-                <a:latin typeface="나눔고딕코딩"/>
-                <a:ea typeface="나눔고딕코딩"/>
-                <a:cs typeface="나눔고딕코딩"/>
+                <a:latin typeface="D2Coding"/>
+                <a:ea typeface="D2Coding"/>
+                <a:cs typeface="D2Coding"/>
               </a:rPr>
               <a:t>SELECT cust_id, grade, city, joined_date, points</a:t>
             </a:r>
@@ -36117,9 +36117,9 @@
                 <a:solidFill>
                   <a:srgbClr val="E6EAF2"/>
                 </a:solidFill>
-                <a:latin typeface="나눔고딕코딩"/>
-                <a:ea typeface="나눔고딕코딩"/>
-                <a:cs typeface="나눔고딕코딩"/>
+                <a:latin typeface="D2Coding"/>
+                <a:ea typeface="D2Coding"/>
+                <a:cs typeface="D2Coding"/>
               </a:rPr>
               <a:t>FROM   customers;</a:t>
             </a:r>
@@ -36135,9 +36135,9 @@
                 <a:solidFill>
                   <a:srgbClr val="E6EAF2"/>
                 </a:solidFill>
-                <a:latin typeface="나눔고딕코딩"/>
-                <a:ea typeface="나눔고딕코딩"/>
-                <a:cs typeface="나눔고딕코딩"/>
+                <a:latin typeface="D2Coding"/>
+                <a:ea typeface="D2Coding"/>
+                <a:cs typeface="D2Coding"/>
               </a:rPr>
               <a:t/>
             </a:r>
@@ -36153,9 +36153,9 @@
                 <a:solidFill>
                   <a:srgbClr val="E6EAF2"/>
                 </a:solidFill>
-                <a:latin typeface="나눔고딕코딩"/>
-                <a:ea typeface="나눔고딕코딩"/>
-                <a:cs typeface="나눔고딕코딩"/>
+                <a:latin typeface="D2Coding"/>
+                <a:ea typeface="D2Coding"/>
+                <a:cs typeface="D2Coding"/>
               </a:rPr>
               <a:t>-- 마케팅 계정에는 원본 대신 뷰만 열어 준다</a:t>
             </a:r>
@@ -36171,9 +36171,9 @@
                 <a:solidFill>
                   <a:srgbClr val="E6EAF2"/>
                 </a:solidFill>
-                <a:latin typeface="나눔고딕코딩"/>
-                <a:ea typeface="나눔고딕코딩"/>
-                <a:cs typeface="나눔고딕코딩"/>
+                <a:latin typeface="D2Coding"/>
+                <a:ea typeface="D2Coding"/>
+                <a:cs typeface="D2Coding"/>
               </a:rPr>
               <a:t>GRANT SELECT ON daon.v_customer_stats TO 'marketing'@'%';</a:t>
             </a:r>
@@ -36189,9 +36189,9 @@
                 <a:solidFill>
                   <a:srgbClr val="E6EAF2"/>
                 </a:solidFill>
-                <a:latin typeface="나눔고딕코딩"/>
-                <a:ea typeface="나눔고딕코딩"/>
-                <a:cs typeface="나눔고딕코딩"/>
+                <a:latin typeface="D2Coding"/>
+                <a:ea typeface="D2Coding"/>
+                <a:cs typeface="D2Coding"/>
               </a:rPr>
               <a:t/>
             </a:r>
@@ -36207,9 +36207,9 @@
                 <a:solidFill>
                   <a:srgbClr val="E6EAF2"/>
                 </a:solidFill>
-                <a:latin typeface="나눔고딕코딩"/>
-                <a:ea typeface="나눔고딕코딩"/>
-                <a:cs typeface="나눔고딕코딩"/>
+                <a:latin typeface="D2Coding"/>
+                <a:ea typeface="D2Coding"/>
+                <a:cs typeface="D2Coding"/>
               </a:rPr>
               <a:t>-- 영업팀에게는 '취소 아닌 주문'만 보이는 창을 낼 수도 있다</a:t>
             </a:r>
@@ -36225,9 +36225,9 @@
                 <a:solidFill>
                   <a:srgbClr val="E6EAF2"/>
                 </a:solidFill>
-                <a:latin typeface="나눔고딕코딩"/>
-                <a:ea typeface="나눔고딕코딩"/>
-                <a:cs typeface="나눔고딕코딩"/>
+                <a:latin typeface="D2Coding"/>
+                <a:ea typeface="D2Coding"/>
+                <a:cs typeface="D2Coding"/>
               </a:rPr>
               <a:t>CREATE VIEW v_valid_orders AS</a:t>
             </a:r>
@@ -36243,9 +36243,9 @@
                 <a:solidFill>
                   <a:srgbClr val="E6EAF2"/>
                 </a:solidFill>
-                <a:latin typeface="나눔고딕코딩"/>
-                <a:ea typeface="나눔고딕코딩"/>
-                <a:cs typeface="나눔고딕코딩"/>
+                <a:latin typeface="D2Coding"/>
+                <a:ea typeface="D2Coding"/>
+                <a:cs typeface="D2Coding"/>
               </a:rPr>
               <a:t>SELECT order_id, cust_id, emp_id, order_date, status</a:t>
             </a:r>
@@ -36261,9 +36261,9 @@
                 <a:solidFill>
                   <a:srgbClr val="E6EAF2"/>
                 </a:solidFill>
-                <a:latin typeface="나눔고딕코딩"/>
-                <a:ea typeface="나눔고딕코딩"/>
-                <a:cs typeface="나눔고딕코딩"/>
+                <a:latin typeface="D2Coding"/>
+                <a:ea typeface="D2Coding"/>
+                <a:cs typeface="D2Coding"/>
               </a:rPr>
               <a:t>FROM   orders</a:t>
             </a:r>
@@ -36279,9 +36279,9 @@
                 <a:solidFill>
                   <a:srgbClr val="E6EAF2"/>
                 </a:solidFill>
-                <a:latin typeface="나눔고딕코딩"/>
-                <a:ea typeface="나눔고딕코딩"/>
-                <a:cs typeface="나눔고딕코딩"/>
+                <a:latin typeface="D2Coding"/>
+                <a:ea typeface="D2Coding"/>
+                <a:cs typeface="D2Coding"/>
               </a:rPr>
               <a:t>WHERE  status &lt;&gt; '취소';</a:t>
             </a:r>
